--- a/lecons/USA/Practical Geography/10_USA_PRA_QT01_Analysis_of_Cartographic_Tools.pptx
+++ b/lecons/USA/Practical Geography/10_USA_PRA_QT01_Analysis_of_Cartographic_Tools.pptx
@@ -4517,7 +4517,7 @@
           <a:p>
             <a:r>
               <a:rPr lang="en-US" dirty="0"/>
-              <a:t>For your homework: Draw a choropleth map of population density by region of Cameroon. We shall correct it at the beginning of our next lesson.</a:t>
+              <a:t>For your homework: Name two sources of secondary data. We shall correct it at the beginning of our next lesson.</a:t>
             </a:r>
             <a:endParaRPr lang="en-US" dirty="0"/>
           </a:p>
@@ -13688,7 +13688,7 @@
               <a:buNone/>
             </a:pPr>
             <a:r>
-              <a:rPr lang="en-US" sz="4000" b="1" dirty="0">
+              <a:rPr lang="en-US" sz="3200" b="1" dirty="0">
                 <a:solidFill>
                   <a:srgbClr val="111111"/>
                 </a:solidFill>
@@ -13698,7 +13698,7 @@
               </a:rPr>
               <a:t>Topic: Quantitative Techniques in Geography</a:t>
             </a:r>
-            <a:endParaRPr lang="en-US" sz="4000" dirty="0"/>
+            <a:endParaRPr lang="en-US" sz="3200" dirty="0"/>
           </a:p>
           <a:p>
             <a:pPr algn="l" indent="0" marL="0">
@@ -13708,7 +13708,7 @@
               <a:buNone/>
             </a:pPr>
             <a:r>
-              <a:rPr lang="en-US" sz="4000" b="1" dirty="0">
+              <a:rPr lang="en-US" sz="3200" b="1" dirty="0">
                 <a:solidFill>
                   <a:srgbClr val="111111"/>
                 </a:solidFill>
@@ -13718,7 +13718,7 @@
               </a:rPr>
               <a:t>Sub-topic: Cartographical techniques</a:t>
             </a:r>
-            <a:endParaRPr lang="en-US" sz="4000" dirty="0"/>
+            <a:endParaRPr lang="en-US" sz="3200" dirty="0"/>
           </a:p>
           <a:p>
             <a:pPr algn="l" indent="0" marL="0">
@@ -13728,7 +13728,7 @@
               <a:buNone/>
             </a:pPr>
             <a:r>
-              <a:rPr lang="en-US" sz="4000" b="1" dirty="0">
+              <a:rPr lang="en-US" sz="3200" b="1" dirty="0">
                 <a:solidFill>
                   <a:srgbClr val="990011"/>
                 </a:solidFill>
@@ -13738,7 +13738,7 @@
               </a:rPr>
               <a:t>Quantitative Techniques 1: Analysis of Cartographic Tools</a:t>
             </a:r>
-            <a:endParaRPr lang="en-US" sz="4000" dirty="0"/>
+            <a:endParaRPr lang="en-US" sz="3200" dirty="0"/>
           </a:p>
         </p:txBody>
       </p:sp>
@@ -17965,7 +17965,7 @@
                 <a:ea typeface="Times New Roman" pitchFamily="34" charset="-122"/>
                 <a:cs typeface="Times New Roman" pitchFamily="34" charset="-120"/>
               </a:rPr>
-              <a:t>Draw a choropleth map of population density by region of Cameroon.</a:t>
+              <a:t>Name two sources of secondary data.</a:t>
             </a:r>
             <a:endParaRPr lang="en-US" sz="4000" dirty="0"/>
           </a:p>
@@ -20629,7 +20629,7 @@
                           <a:ea typeface="Calibri" pitchFamily="34" charset="-122"/>
                           <a:cs typeface="Calibri" pitchFamily="34" charset="-120"/>
                         </a:rPr>
-                        <a:t>Draw a choropleth map of population density by region of Cameroon.</a:t>
+                        <a:t>Name two sources of secondary data.</a:t>
                       </a:r>
                       <a:endParaRPr lang="en-US" sz="1600" dirty="0">
                         <a:latin typeface="Calibri" charset="0"/>
